--- a/Problem Statement.pptx
+++ b/Problem Statement.pptx
@@ -9,7 +9,6 @@
     <p:sldId id="258" r:id="rId3"/>
     <p:sldId id="257" r:id="rId4"/>
     <p:sldId id="259" r:id="rId5"/>
-    <p:sldId id="260" r:id="rId6"/>
   </p:sldIdLst>
   <p:sldSz cx="12192000" cy="6858000"/>
   <p:notesSz cx="6858000" cy="9144000"/>
@@ -265,7 +264,7 @@
           <a:p>
             <a:fld id="{4CEA8C0D-AF51-45C5-B2E1-B5F89F9AF0B0}" type="datetimeFigureOut">
               <a:rPr lang="en-IN" smtClean="0"/>
-              <a:t>27-10-2024</a:t>
+              <a:t>01-05-2025</a:t>
             </a:fld>
             <a:endParaRPr lang="en-IN"/>
           </a:p>
@@ -465,7 +464,7 @@
           <a:p>
             <a:fld id="{4CEA8C0D-AF51-45C5-B2E1-B5F89F9AF0B0}" type="datetimeFigureOut">
               <a:rPr lang="en-IN" smtClean="0"/>
-              <a:t>27-10-2024</a:t>
+              <a:t>01-05-2025</a:t>
             </a:fld>
             <a:endParaRPr lang="en-IN"/>
           </a:p>
@@ -675,7 +674,7 @@
           <a:p>
             <a:fld id="{4CEA8C0D-AF51-45C5-B2E1-B5F89F9AF0B0}" type="datetimeFigureOut">
               <a:rPr lang="en-IN" smtClean="0"/>
-              <a:t>27-10-2024</a:t>
+              <a:t>01-05-2025</a:t>
             </a:fld>
             <a:endParaRPr lang="en-IN"/>
           </a:p>
@@ -875,7 +874,7 @@
           <a:p>
             <a:fld id="{4CEA8C0D-AF51-45C5-B2E1-B5F89F9AF0B0}" type="datetimeFigureOut">
               <a:rPr lang="en-IN" smtClean="0"/>
-              <a:t>27-10-2024</a:t>
+              <a:t>01-05-2025</a:t>
             </a:fld>
             <a:endParaRPr lang="en-IN"/>
           </a:p>
@@ -1151,7 +1150,7 @@
           <a:p>
             <a:fld id="{4CEA8C0D-AF51-45C5-B2E1-B5F89F9AF0B0}" type="datetimeFigureOut">
               <a:rPr lang="en-IN" smtClean="0"/>
-              <a:t>27-10-2024</a:t>
+              <a:t>01-05-2025</a:t>
             </a:fld>
             <a:endParaRPr lang="en-IN"/>
           </a:p>
@@ -1419,7 +1418,7 @@
           <a:p>
             <a:fld id="{4CEA8C0D-AF51-45C5-B2E1-B5F89F9AF0B0}" type="datetimeFigureOut">
               <a:rPr lang="en-IN" smtClean="0"/>
-              <a:t>27-10-2024</a:t>
+              <a:t>01-05-2025</a:t>
             </a:fld>
             <a:endParaRPr lang="en-IN"/>
           </a:p>
@@ -1834,7 +1833,7 @@
           <a:p>
             <a:fld id="{4CEA8C0D-AF51-45C5-B2E1-B5F89F9AF0B0}" type="datetimeFigureOut">
               <a:rPr lang="en-IN" smtClean="0"/>
-              <a:t>27-10-2024</a:t>
+              <a:t>01-05-2025</a:t>
             </a:fld>
             <a:endParaRPr lang="en-IN"/>
           </a:p>
@@ -1976,7 +1975,7 @@
           <a:p>
             <a:fld id="{4CEA8C0D-AF51-45C5-B2E1-B5F89F9AF0B0}" type="datetimeFigureOut">
               <a:rPr lang="en-IN" smtClean="0"/>
-              <a:t>27-10-2024</a:t>
+              <a:t>01-05-2025</a:t>
             </a:fld>
             <a:endParaRPr lang="en-IN"/>
           </a:p>
@@ -2089,7 +2088,7 @@
           <a:p>
             <a:fld id="{4CEA8C0D-AF51-45C5-B2E1-B5F89F9AF0B0}" type="datetimeFigureOut">
               <a:rPr lang="en-IN" smtClean="0"/>
-              <a:t>27-10-2024</a:t>
+              <a:t>01-05-2025</a:t>
             </a:fld>
             <a:endParaRPr lang="en-IN"/>
           </a:p>
@@ -2402,7 +2401,7 @@
           <a:p>
             <a:fld id="{4CEA8C0D-AF51-45C5-B2E1-B5F89F9AF0B0}" type="datetimeFigureOut">
               <a:rPr lang="en-IN" smtClean="0"/>
-              <a:t>27-10-2024</a:t>
+              <a:t>01-05-2025</a:t>
             </a:fld>
             <a:endParaRPr lang="en-IN"/>
           </a:p>
@@ -2691,7 +2690,7 @@
           <a:p>
             <a:fld id="{4CEA8C0D-AF51-45C5-B2E1-B5F89F9AF0B0}" type="datetimeFigureOut">
               <a:rPr lang="en-IN" smtClean="0"/>
-              <a:t>27-10-2024</a:t>
+              <a:t>01-05-2025</a:t>
             </a:fld>
             <a:endParaRPr lang="en-IN"/>
           </a:p>
@@ -2934,7 +2933,7 @@
           <a:p>
             <a:fld id="{4CEA8C0D-AF51-45C5-B2E1-B5F89F9AF0B0}" type="datetimeFigureOut">
               <a:rPr lang="en-IN" smtClean="0"/>
-              <a:t>27-10-2024</a:t>
+              <a:t>01-05-2025</a:t>
             </a:fld>
             <a:endParaRPr lang="en-IN"/>
           </a:p>
@@ -3914,42 +3913,6 @@
           </a:extLst>
         </p:spPr>
       </p:pic>
-      <p:pic>
-        <p:nvPicPr>
-          <p:cNvPr id="5" name="Picture 4">
-            <a:extLst>
-              <a:ext uri="{FF2B5EF4-FFF2-40B4-BE49-F238E27FC236}">
-                <a16:creationId xmlns:a16="http://schemas.microsoft.com/office/drawing/2014/main" id="{371BECE0-1F05-1854-9298-069316FF67B1}"/>
-              </a:ext>
-            </a:extLst>
-          </p:cNvPr>
-          <p:cNvPicPr>
-            <a:picLocks noChangeAspect="1"/>
-          </p:cNvPicPr>
-          <p:nvPr/>
-        </p:nvPicPr>
-        <p:blipFill>
-          <a:blip r:embed="rId3">
-            <a:extLst>
-              <a:ext uri="{28A0092B-C50C-407E-A947-70E740481C1C}">
-                <a14:useLocalDpi xmlns:a14="http://schemas.microsoft.com/office/drawing/2010/main" val="0"/>
-              </a:ext>
-            </a:extLst>
-          </a:blip>
-          <a:stretch>
-            <a:fillRect/>
-          </a:stretch>
-        </p:blipFill>
-        <p:spPr>
-          <a:xfrm>
-            <a:off x="10810115" y="-42336"/>
-            <a:ext cx="1247776" cy="1247776"/>
-          </a:xfrm>
-          <a:prstGeom prst="rect">
-            <a:avLst/>
-          </a:prstGeom>
-        </p:spPr>
-      </p:pic>
       <p:sp>
         <p:nvSpPr>
           <p:cNvPr id="6" name="TextBox 2">
@@ -4114,7 +4077,7 @@
           <p:nvPr/>
         </p:nvPicPr>
         <p:blipFill>
-          <a:blip r:embed="rId4">
+          <a:blip r:embed="rId3">
             <a:extLst>
               <a:ext uri="{28A0092B-C50C-407E-A947-70E740481C1C}">
                 <a14:useLocalDpi xmlns:a14="http://schemas.microsoft.com/office/drawing/2010/main" val="0"/>
@@ -5130,42 +5093,6 @@
       </p:pic>
       <p:pic>
         <p:nvPicPr>
-          <p:cNvPr id="5" name="Picture 4">
-            <a:extLst>
-              <a:ext uri="{FF2B5EF4-FFF2-40B4-BE49-F238E27FC236}">
-                <a16:creationId xmlns:a16="http://schemas.microsoft.com/office/drawing/2014/main" id="{371BECE0-1F05-1854-9298-069316FF67B1}"/>
-              </a:ext>
-            </a:extLst>
-          </p:cNvPr>
-          <p:cNvPicPr>
-            <a:picLocks noChangeAspect="1"/>
-          </p:cNvPicPr>
-          <p:nvPr/>
-        </p:nvPicPr>
-        <p:blipFill>
-          <a:blip r:embed="rId3">
-            <a:extLst>
-              <a:ext uri="{28A0092B-C50C-407E-A947-70E740481C1C}">
-                <a14:useLocalDpi xmlns:a14="http://schemas.microsoft.com/office/drawing/2010/main" val="0"/>
-              </a:ext>
-            </a:extLst>
-          </a:blip>
-          <a:stretch>
-            <a:fillRect/>
-          </a:stretch>
-        </p:blipFill>
-        <p:spPr>
-          <a:xfrm>
-            <a:off x="10810115" y="-42336"/>
-            <a:ext cx="1247776" cy="1247776"/>
-          </a:xfrm>
-          <a:prstGeom prst="rect">
-            <a:avLst/>
-          </a:prstGeom>
-        </p:spPr>
-      </p:pic>
-      <p:pic>
-        <p:nvPicPr>
           <p:cNvPr id="7" name="Picture 4" descr="Power BI - Udemy Business">
             <a:extLst>
               <a:ext uri="{FF2B5EF4-FFF2-40B4-BE49-F238E27FC236}">
@@ -5179,7 +5106,7 @@
           <p:nvPr/>
         </p:nvPicPr>
         <p:blipFill>
-          <a:blip r:embed="rId4">
+          <a:blip r:embed="rId3">
             <a:extLst>
               <a:ext uri="{28A0092B-C50C-407E-A947-70E740481C1C}">
                 <a14:useLocalDpi xmlns:a14="http://schemas.microsoft.com/office/drawing/2010/main" val="0"/>
@@ -6511,42 +6438,6 @@
       </p:pic>
       <p:pic>
         <p:nvPicPr>
-          <p:cNvPr id="5" name="Picture 4">
-            <a:extLst>
-              <a:ext uri="{FF2B5EF4-FFF2-40B4-BE49-F238E27FC236}">
-                <a16:creationId xmlns:a16="http://schemas.microsoft.com/office/drawing/2014/main" id="{371BECE0-1F05-1854-9298-069316FF67B1}"/>
-              </a:ext>
-            </a:extLst>
-          </p:cNvPr>
-          <p:cNvPicPr>
-            <a:picLocks noChangeAspect="1"/>
-          </p:cNvPicPr>
-          <p:nvPr/>
-        </p:nvPicPr>
-        <p:blipFill>
-          <a:blip r:embed="rId3">
-            <a:extLst>
-              <a:ext uri="{28A0092B-C50C-407E-A947-70E740481C1C}">
-                <a14:useLocalDpi xmlns:a14="http://schemas.microsoft.com/office/drawing/2010/main" val="0"/>
-              </a:ext>
-            </a:extLst>
-          </a:blip>
-          <a:stretch>
-            <a:fillRect/>
-          </a:stretch>
-        </p:blipFill>
-        <p:spPr>
-          <a:xfrm>
-            <a:off x="10810115" y="-42336"/>
-            <a:ext cx="1247776" cy="1247776"/>
-          </a:xfrm>
-          <a:prstGeom prst="rect">
-            <a:avLst/>
-          </a:prstGeom>
-        </p:spPr>
-      </p:pic>
-      <p:pic>
-        <p:nvPicPr>
           <p:cNvPr id="7" name="Picture 4" descr="Power BI - Udemy Business">
             <a:extLst>
               <a:ext uri="{FF2B5EF4-FFF2-40B4-BE49-F238E27FC236}">
@@ -6560,7 +6451,7 @@
           <p:nvPr/>
         </p:nvPicPr>
         <p:blipFill>
-          <a:blip r:embed="rId4">
+          <a:blip r:embed="rId3">
             <a:extLst>
               <a:ext uri="{28A0092B-C50C-407E-A947-70E740481C1C}">
                 <a14:useLocalDpi xmlns:a14="http://schemas.microsoft.com/office/drawing/2010/main" val="0"/>
@@ -7790,42 +7681,6 @@
       </p:pic>
       <p:pic>
         <p:nvPicPr>
-          <p:cNvPr id="5" name="Picture 4">
-            <a:extLst>
-              <a:ext uri="{FF2B5EF4-FFF2-40B4-BE49-F238E27FC236}">
-                <a16:creationId xmlns:a16="http://schemas.microsoft.com/office/drawing/2014/main" id="{371BECE0-1F05-1854-9298-069316FF67B1}"/>
-              </a:ext>
-            </a:extLst>
-          </p:cNvPr>
-          <p:cNvPicPr>
-            <a:picLocks noChangeAspect="1"/>
-          </p:cNvPicPr>
-          <p:nvPr/>
-        </p:nvPicPr>
-        <p:blipFill>
-          <a:blip r:embed="rId3">
-            <a:extLst>
-              <a:ext uri="{28A0092B-C50C-407E-A947-70E740481C1C}">
-                <a14:useLocalDpi xmlns:a14="http://schemas.microsoft.com/office/drawing/2010/main" val="0"/>
-              </a:ext>
-            </a:extLst>
-          </a:blip>
-          <a:stretch>
-            <a:fillRect/>
-          </a:stretch>
-        </p:blipFill>
-        <p:spPr>
-          <a:xfrm>
-            <a:off x="10810115" y="-42336"/>
-            <a:ext cx="1247776" cy="1247776"/>
-          </a:xfrm>
-          <a:prstGeom prst="rect">
-            <a:avLst/>
-          </a:prstGeom>
-        </p:spPr>
-      </p:pic>
-      <p:pic>
-        <p:nvPicPr>
           <p:cNvPr id="7" name="Picture 4" descr="Power BI - Udemy Business">
             <a:extLst>
               <a:ext uri="{FF2B5EF4-FFF2-40B4-BE49-F238E27FC236}">
@@ -7839,7 +7694,7 @@
           <p:nvPr/>
         </p:nvPicPr>
         <p:blipFill>
-          <a:blip r:embed="rId4">
+          <a:blip r:embed="rId3">
             <a:extLst>
               <a:ext uri="{28A0092B-C50C-407E-A947-70E740481C1C}">
                 <a14:useLocalDpi xmlns:a14="http://schemas.microsoft.com/office/drawing/2010/main" val="0"/>
@@ -8509,857 +8364,6 @@
     <p:extLst>
       <p:ext uri="{BB962C8B-B14F-4D97-AF65-F5344CB8AC3E}">
         <p14:creationId xmlns:p14="http://schemas.microsoft.com/office/powerpoint/2010/main" val="1109128806"/>
-      </p:ext>
-    </p:extLst>
-  </p:cSld>
-  <p:clrMapOvr>
-    <a:masterClrMapping/>
-  </p:clrMapOvr>
-</p:sld>
-</file>
-
-<file path=ppt/slides/slide5.xml><?xml version="1.0" encoding="utf-8"?>
-<p:sld xmlns:a="http://schemas.openxmlformats.org/drawingml/2006/main" xmlns:r="http://schemas.openxmlformats.org/officeDocument/2006/relationships" xmlns:p="http://schemas.openxmlformats.org/presentationml/2006/main">
-  <p:cSld>
-    <p:spTree>
-      <p:nvGrpSpPr>
-        <p:cNvPr id="1" name=""/>
-        <p:cNvGrpSpPr/>
-        <p:nvPr/>
-      </p:nvGrpSpPr>
-      <p:grpSpPr>
-        <a:xfrm>
-          <a:off x="0" y="0"/>
-          <a:ext cx="0" cy="0"/>
-          <a:chOff x="0" y="0"/>
-          <a:chExt cx="0" cy="0"/>
-        </a:xfrm>
-      </p:grpSpPr>
-      <p:grpSp>
-        <p:nvGrpSpPr>
-          <p:cNvPr id="53" name="Group 52">
-            <a:extLst>
-              <a:ext uri="{FF2B5EF4-FFF2-40B4-BE49-F238E27FC236}">
-                <a16:creationId xmlns:a16="http://schemas.microsoft.com/office/drawing/2014/main" id="{87D7454A-6EA6-AAC1-A12D-8B9826486437}"/>
-              </a:ext>
-            </a:extLst>
-          </p:cNvPr>
-          <p:cNvGrpSpPr/>
-          <p:nvPr/>
-        </p:nvGrpSpPr>
-        <p:grpSpPr>
-          <a:xfrm>
-            <a:off x="-1" y="0"/>
-            <a:ext cx="12192002" cy="6876637"/>
-            <a:chOff x="-2" y="0"/>
-            <a:chExt cx="12192002" cy="6876637"/>
-          </a:xfrm>
-        </p:grpSpPr>
-        <p:sp>
-          <p:nvSpPr>
-            <p:cNvPr id="54" name="Rectangle: Single Corner Rounded 53">
-              <a:extLst>
-                <a:ext uri="{FF2B5EF4-FFF2-40B4-BE49-F238E27FC236}">
-                  <a16:creationId xmlns:a16="http://schemas.microsoft.com/office/drawing/2014/main" id="{5CE60D23-7E63-381C-BFD9-4126EA6C6A96}"/>
-                </a:ext>
-              </a:extLst>
-            </p:cNvPr>
-            <p:cNvSpPr/>
-            <p:nvPr/>
-          </p:nvSpPr>
-          <p:spPr>
-            <a:xfrm rot="5400000">
-              <a:off x="7418615" y="-1877787"/>
-              <a:ext cx="1926768" cy="5682342"/>
-            </a:xfrm>
-            <a:prstGeom prst="round1Rect">
-              <a:avLst>
-                <a:gd name="adj" fmla="val 15311"/>
-              </a:avLst>
-            </a:prstGeom>
-            <a:solidFill>
-              <a:schemeClr val="accent5">
-                <a:lumMod val="75000"/>
-              </a:schemeClr>
-            </a:solidFill>
-            <a:ln>
-              <a:noFill/>
-            </a:ln>
-          </p:spPr>
-          <p:style>
-            <a:lnRef idx="2">
-              <a:schemeClr val="accent1">
-                <a:shade val="15000"/>
-              </a:schemeClr>
-            </a:lnRef>
-            <a:fillRef idx="1">
-              <a:schemeClr val="accent1"/>
-            </a:fillRef>
-            <a:effectRef idx="0">
-              <a:schemeClr val="accent1"/>
-            </a:effectRef>
-            <a:fontRef idx="minor">
-              <a:schemeClr val="lt1"/>
-            </a:fontRef>
-          </p:style>
-          <p:txBody>
-            <a:bodyPr rtlCol="0" anchor="ctr"/>
-            <a:lstStyle/>
-            <a:p>
-              <a:pPr algn="ctr"/>
-              <a:endParaRPr lang="en-IN"/>
-            </a:p>
-          </p:txBody>
-        </p:sp>
-        <p:sp>
-          <p:nvSpPr>
-            <p:cNvPr id="55" name="Rectangle: Single Corner Rounded 54">
-              <a:extLst>
-                <a:ext uri="{FF2B5EF4-FFF2-40B4-BE49-F238E27FC236}">
-                  <a16:creationId xmlns:a16="http://schemas.microsoft.com/office/drawing/2014/main" id="{E0EF6237-2429-3EA3-3E71-3E21812D4DCB}"/>
-                </a:ext>
-              </a:extLst>
-            </p:cNvPr>
-            <p:cNvSpPr/>
-            <p:nvPr/>
-          </p:nvSpPr>
-          <p:spPr>
-            <a:xfrm>
-              <a:off x="0" y="0"/>
-              <a:ext cx="6294120" cy="3429000"/>
-            </a:xfrm>
-            <a:prstGeom prst="round1Rect">
-              <a:avLst>
-                <a:gd name="adj" fmla="val 15311"/>
-              </a:avLst>
-            </a:prstGeom>
-            <a:solidFill>
-              <a:schemeClr val="accent4">
-                <a:lumMod val="75000"/>
-              </a:schemeClr>
-            </a:solidFill>
-            <a:ln>
-              <a:noFill/>
-            </a:ln>
-          </p:spPr>
-          <p:style>
-            <a:lnRef idx="2">
-              <a:schemeClr val="accent1">
-                <a:shade val="15000"/>
-              </a:schemeClr>
-            </a:lnRef>
-            <a:fillRef idx="1">
-              <a:schemeClr val="accent1"/>
-            </a:fillRef>
-            <a:effectRef idx="0">
-              <a:schemeClr val="accent1"/>
-            </a:effectRef>
-            <a:fontRef idx="minor">
-              <a:schemeClr val="lt1"/>
-            </a:fontRef>
-          </p:style>
-          <p:txBody>
-            <a:bodyPr rtlCol="0" anchor="ctr"/>
-            <a:lstStyle/>
-            <a:p>
-              <a:pPr algn="ctr"/>
-              <a:endParaRPr lang="en-IN"/>
-            </a:p>
-          </p:txBody>
-        </p:sp>
-        <p:sp>
-          <p:nvSpPr>
-            <p:cNvPr id="56" name="Rectangle: Single Corner Rounded 55">
-              <a:extLst>
-                <a:ext uri="{FF2B5EF4-FFF2-40B4-BE49-F238E27FC236}">
-                  <a16:creationId xmlns:a16="http://schemas.microsoft.com/office/drawing/2014/main" id="{66C6F168-E8AE-717D-1B86-941316A8EB93}"/>
-                </a:ext>
-              </a:extLst>
-            </p:cNvPr>
-            <p:cNvSpPr/>
-            <p:nvPr/>
-          </p:nvSpPr>
-          <p:spPr>
-            <a:xfrm flipH="1">
-              <a:off x="-2" y="2824495"/>
-              <a:ext cx="7141029" cy="4052142"/>
-            </a:xfrm>
-            <a:prstGeom prst="round1Rect">
-              <a:avLst>
-                <a:gd name="adj" fmla="val 12705"/>
-              </a:avLst>
-            </a:prstGeom>
-            <a:solidFill>
-              <a:srgbClr val="00A249"/>
-            </a:solidFill>
-            <a:ln>
-              <a:noFill/>
-            </a:ln>
-          </p:spPr>
-          <p:style>
-            <a:lnRef idx="2">
-              <a:schemeClr val="accent1">
-                <a:shade val="15000"/>
-              </a:schemeClr>
-            </a:lnRef>
-            <a:fillRef idx="1">
-              <a:schemeClr val="accent1"/>
-            </a:fillRef>
-            <a:effectRef idx="0">
-              <a:schemeClr val="accent1"/>
-            </a:effectRef>
-            <a:fontRef idx="minor">
-              <a:schemeClr val="lt1"/>
-            </a:fontRef>
-          </p:style>
-          <p:txBody>
-            <a:bodyPr rtlCol="0" anchor="ctr"/>
-            <a:lstStyle/>
-            <a:p>
-              <a:pPr algn="ctr"/>
-              <a:endParaRPr lang="en-IN"/>
-            </a:p>
-          </p:txBody>
-        </p:sp>
-        <p:sp>
-          <p:nvSpPr>
-            <p:cNvPr id="57" name="Rectangle: Single Corner Rounded 56">
-              <a:extLst>
-                <a:ext uri="{FF2B5EF4-FFF2-40B4-BE49-F238E27FC236}">
-                  <a16:creationId xmlns:a16="http://schemas.microsoft.com/office/drawing/2014/main" id="{4736C802-5CA3-8FAD-0EA0-F2537FC4C555}"/>
-                </a:ext>
-              </a:extLst>
-            </p:cNvPr>
-            <p:cNvSpPr/>
-            <p:nvPr/>
-          </p:nvSpPr>
-          <p:spPr>
-            <a:xfrm rot="10800000">
-              <a:off x="5824728" y="2503710"/>
-              <a:ext cx="6367272" cy="4372926"/>
-            </a:xfrm>
-            <a:prstGeom prst="round1Rect">
-              <a:avLst>
-                <a:gd name="adj" fmla="val 15311"/>
-              </a:avLst>
-            </a:prstGeom>
-            <a:solidFill>
-              <a:srgbClr val="B248A5"/>
-            </a:solidFill>
-            <a:ln>
-              <a:noFill/>
-            </a:ln>
-          </p:spPr>
-          <p:style>
-            <a:lnRef idx="2">
-              <a:schemeClr val="accent1">
-                <a:shade val="15000"/>
-              </a:schemeClr>
-            </a:lnRef>
-            <a:fillRef idx="1">
-              <a:schemeClr val="accent1"/>
-            </a:fillRef>
-            <a:effectRef idx="0">
-              <a:schemeClr val="accent1"/>
-            </a:effectRef>
-            <a:fontRef idx="minor">
-              <a:schemeClr val="lt1"/>
-            </a:fontRef>
-          </p:style>
-          <p:txBody>
-            <a:bodyPr rtlCol="0" anchor="ctr"/>
-            <a:lstStyle/>
-            <a:p>
-              <a:pPr algn="ctr"/>
-              <a:endParaRPr lang="en-IN"/>
-            </a:p>
-          </p:txBody>
-        </p:sp>
-        <p:sp>
-          <p:nvSpPr>
-            <p:cNvPr id="58" name="Rectangle: Single Corner Rounded 57">
-              <a:extLst>
-                <a:ext uri="{FF2B5EF4-FFF2-40B4-BE49-F238E27FC236}">
-                  <a16:creationId xmlns:a16="http://schemas.microsoft.com/office/drawing/2014/main" id="{ABD077F4-6080-CD4F-443D-E0C6FCFB489D}"/>
-                </a:ext>
-              </a:extLst>
-            </p:cNvPr>
-            <p:cNvSpPr/>
-            <p:nvPr/>
-          </p:nvSpPr>
-          <p:spPr>
-            <a:xfrm rot="5400000">
-              <a:off x="7571015" y="-1061357"/>
-              <a:ext cx="3559628" cy="5682342"/>
-            </a:xfrm>
-            <a:prstGeom prst="round1Rect">
-              <a:avLst>
-                <a:gd name="adj" fmla="val 15311"/>
-              </a:avLst>
-            </a:prstGeom>
-            <a:solidFill>
-              <a:schemeClr val="accent5">
-                <a:lumMod val="75000"/>
-              </a:schemeClr>
-            </a:solidFill>
-            <a:ln>
-              <a:noFill/>
-            </a:ln>
-          </p:spPr>
-          <p:style>
-            <a:lnRef idx="2">
-              <a:schemeClr val="accent1">
-                <a:shade val="15000"/>
-              </a:schemeClr>
-            </a:lnRef>
-            <a:fillRef idx="1">
-              <a:schemeClr val="accent1"/>
-            </a:fillRef>
-            <a:effectRef idx="0">
-              <a:schemeClr val="accent1"/>
-            </a:effectRef>
-            <a:fontRef idx="minor">
-              <a:schemeClr val="lt1"/>
-            </a:fontRef>
-          </p:style>
-          <p:txBody>
-            <a:bodyPr rtlCol="0" anchor="ctr"/>
-            <a:lstStyle/>
-            <a:p>
-              <a:pPr algn="ctr"/>
-              <a:endParaRPr lang="en-IN"/>
-            </a:p>
-          </p:txBody>
-        </p:sp>
-      </p:grpSp>
-      <p:sp>
-        <p:nvSpPr>
-          <p:cNvPr id="4" name="Rectangle: Rounded Corners 3">
-            <a:extLst>
-              <a:ext uri="{FF2B5EF4-FFF2-40B4-BE49-F238E27FC236}">
-                <a16:creationId xmlns:a16="http://schemas.microsoft.com/office/drawing/2014/main" id="{98223BD5-EF6E-F14D-F34F-303B1A380356}"/>
-              </a:ext>
-            </a:extLst>
-          </p:cNvPr>
-          <p:cNvSpPr/>
-          <p:nvPr/>
-        </p:nvSpPr>
-        <p:spPr>
-          <a:xfrm>
-            <a:off x="182880" y="164684"/>
-            <a:ext cx="11832336" cy="6528816"/>
-          </a:xfrm>
-          <a:prstGeom prst="roundRect">
-            <a:avLst>
-              <a:gd name="adj" fmla="val 2381"/>
-            </a:avLst>
-          </a:prstGeom>
-          <a:solidFill>
-            <a:schemeClr val="bg1"/>
-          </a:solidFill>
-          <a:ln>
-            <a:solidFill>
-              <a:schemeClr val="bg1">
-                <a:lumMod val="75000"/>
-              </a:schemeClr>
-            </a:solidFill>
-          </a:ln>
-        </p:spPr>
-        <p:style>
-          <a:lnRef idx="2">
-            <a:schemeClr val="accent1">
-              <a:shade val="15000"/>
-            </a:schemeClr>
-          </a:lnRef>
-          <a:fillRef idx="1">
-            <a:schemeClr val="accent1"/>
-          </a:fillRef>
-          <a:effectRef idx="0">
-            <a:schemeClr val="accent1"/>
-          </a:effectRef>
-          <a:fontRef idx="minor">
-            <a:schemeClr val="lt1"/>
-          </a:fontRef>
-        </p:style>
-        <p:txBody>
-          <a:bodyPr rtlCol="0" anchor="ctr"/>
-          <a:lstStyle/>
-          <a:p>
-            <a:pPr algn="ctr"/>
-            <a:endParaRPr lang="en-IN"/>
-          </a:p>
-        </p:txBody>
-      </p:sp>
-      <p:sp>
-        <p:nvSpPr>
-          <p:cNvPr id="2" name="TextBox 2">
-            <a:extLst>
-              <a:ext uri="{FF2B5EF4-FFF2-40B4-BE49-F238E27FC236}">
-                <a16:creationId xmlns:a16="http://schemas.microsoft.com/office/drawing/2014/main" id="{1EDBFF20-866A-3F91-DC0C-E6135DAAEF98}"/>
-              </a:ext>
-            </a:extLst>
-          </p:cNvPr>
-          <p:cNvSpPr txBox="1"/>
-          <p:nvPr/>
-        </p:nvSpPr>
-        <p:spPr>
-          <a:xfrm>
-            <a:off x="3163373" y="125899"/>
-            <a:ext cx="6692571" cy="583407"/>
-          </a:xfrm>
-          <a:prstGeom prst="rect">
-            <a:avLst/>
-          </a:prstGeom>
-          <a:noFill/>
-          <a:ln w="9525" cmpd="sng">
-            <a:noFill/>
-          </a:ln>
-        </p:spPr>
-        <p:style>
-          <a:lnRef idx="0">
-            <a:scrgbClr r="0" g="0" b="0"/>
-          </a:lnRef>
-          <a:fillRef idx="0">
-            <a:scrgbClr r="0" g="0" b="0"/>
-          </a:fillRef>
-          <a:effectRef idx="0">
-            <a:scrgbClr r="0" g="0" b="0"/>
-          </a:effectRef>
-          <a:fontRef idx="minor">
-            <a:schemeClr val="dk1"/>
-          </a:fontRef>
-        </p:style>
-        <p:txBody>
-          <a:bodyPr wrap="square" rtlCol="0" anchor="ctr"/>
-          <a:lstStyle>
-            <a:lvl1pPr marL="0" indent="0">
-              <a:defRPr sz="1100">
-                <a:solidFill>
-                  <a:schemeClr val="dk1"/>
-                </a:solidFill>
-                <a:latin typeface="+mn-lt"/>
-                <a:ea typeface="+mn-ea"/>
-                <a:cs typeface="+mn-cs"/>
-              </a:defRPr>
-            </a:lvl1pPr>
-            <a:lvl2pPr marL="457200" indent="0">
-              <a:defRPr sz="1100">
-                <a:solidFill>
-                  <a:schemeClr val="dk1"/>
-                </a:solidFill>
-                <a:latin typeface="+mn-lt"/>
-                <a:ea typeface="+mn-ea"/>
-                <a:cs typeface="+mn-cs"/>
-              </a:defRPr>
-            </a:lvl2pPr>
-            <a:lvl3pPr marL="914400" indent="0">
-              <a:defRPr sz="1100">
-                <a:solidFill>
-                  <a:schemeClr val="dk1"/>
-                </a:solidFill>
-                <a:latin typeface="+mn-lt"/>
-                <a:ea typeface="+mn-ea"/>
-                <a:cs typeface="+mn-cs"/>
-              </a:defRPr>
-            </a:lvl3pPr>
-            <a:lvl4pPr marL="1371600" indent="0">
-              <a:defRPr sz="1100">
-                <a:solidFill>
-                  <a:schemeClr val="dk1"/>
-                </a:solidFill>
-                <a:latin typeface="+mn-lt"/>
-                <a:ea typeface="+mn-ea"/>
-                <a:cs typeface="+mn-cs"/>
-              </a:defRPr>
-            </a:lvl4pPr>
-            <a:lvl5pPr marL="1828800" indent="0">
-              <a:defRPr sz="1100">
-                <a:solidFill>
-                  <a:schemeClr val="dk1"/>
-                </a:solidFill>
-                <a:latin typeface="+mn-lt"/>
-                <a:ea typeface="+mn-ea"/>
-                <a:cs typeface="+mn-cs"/>
-              </a:defRPr>
-            </a:lvl5pPr>
-            <a:lvl6pPr marL="2286000" indent="0">
-              <a:defRPr sz="1100">
-                <a:solidFill>
-                  <a:schemeClr val="dk1"/>
-                </a:solidFill>
-                <a:latin typeface="+mn-lt"/>
-                <a:ea typeface="+mn-ea"/>
-                <a:cs typeface="+mn-cs"/>
-              </a:defRPr>
-            </a:lvl6pPr>
-            <a:lvl7pPr marL="2743200" indent="0">
-              <a:defRPr sz="1100">
-                <a:solidFill>
-                  <a:schemeClr val="dk1"/>
-                </a:solidFill>
-                <a:latin typeface="+mn-lt"/>
-                <a:ea typeface="+mn-ea"/>
-                <a:cs typeface="+mn-cs"/>
-              </a:defRPr>
-            </a:lvl7pPr>
-            <a:lvl8pPr marL="3200400" indent="0">
-              <a:defRPr sz="1100">
-                <a:solidFill>
-                  <a:schemeClr val="dk1"/>
-                </a:solidFill>
-                <a:latin typeface="+mn-lt"/>
-                <a:ea typeface="+mn-ea"/>
-                <a:cs typeface="+mn-cs"/>
-              </a:defRPr>
-            </a:lvl8pPr>
-            <a:lvl9pPr marL="3657600" indent="0">
-              <a:defRPr sz="1100">
-                <a:solidFill>
-                  <a:schemeClr val="dk1"/>
-                </a:solidFill>
-                <a:latin typeface="+mn-lt"/>
-                <a:ea typeface="+mn-ea"/>
-                <a:cs typeface="+mn-cs"/>
-              </a:defRPr>
-            </a:lvl9pPr>
-          </a:lstStyle>
-          <a:p>
-            <a:pPr algn="ctr"/>
-            <a:r>
-              <a:rPr lang="en-IN" sz="3600" dirty="0">
-                <a:latin typeface="Segoe UI Black" panose="020B0A02040204020203" pitchFamily="34" charset="0"/>
-                <a:ea typeface="Segoe UI Black" panose="020B0A02040204020203" pitchFamily="34" charset="0"/>
-              </a:rPr>
-              <a:t>Sales Overview Analysis</a:t>
-            </a:r>
-            <a:endParaRPr lang="en-IN" sz="3600" dirty="0">
-              <a:solidFill>
-                <a:schemeClr val="accent5">
-                  <a:lumMod val="75000"/>
-                </a:schemeClr>
-              </a:solidFill>
-              <a:latin typeface="Segoe UI Black" panose="020B0A02040204020203" pitchFamily="34" charset="0"/>
-              <a:ea typeface="Segoe UI Black" panose="020B0A02040204020203" pitchFamily="34" charset="0"/>
-            </a:endParaRPr>
-          </a:p>
-        </p:txBody>
-      </p:sp>
-      <p:pic>
-        <p:nvPicPr>
-          <p:cNvPr id="3" name="Picture 2">
-            <a:extLst>
-              <a:ext uri="{FF2B5EF4-FFF2-40B4-BE49-F238E27FC236}">
-                <a16:creationId xmlns:a16="http://schemas.microsoft.com/office/drawing/2014/main" id="{FB0C64B1-31CB-2CBA-5181-0BA3A83CAC59}"/>
-              </a:ext>
-            </a:extLst>
-          </p:cNvPr>
-          <p:cNvPicPr>
-            <a:picLocks noChangeAspect="1" noChangeArrowheads="1"/>
-          </p:cNvPicPr>
-          <p:nvPr/>
-        </p:nvPicPr>
-        <p:blipFill>
-          <a:blip r:embed="rId2">
-            <a:duotone>
-              <a:schemeClr val="accent4">
-                <a:shade val="45000"/>
-                <a:satMod val="135000"/>
-              </a:schemeClr>
-              <a:prstClr val="white"/>
-            </a:duotone>
-            <a:extLst>
-              <a:ext uri="{28A0092B-C50C-407E-A947-70E740481C1C}">
-                <a14:useLocalDpi xmlns:a14="http://schemas.microsoft.com/office/drawing/2010/main" val="0"/>
-              </a:ext>
-            </a:extLst>
-          </a:blip>
-          <a:srcRect/>
-          <a:stretch>
-            <a:fillRect/>
-          </a:stretch>
-        </p:blipFill>
-        <p:spPr bwMode="auto">
-          <a:xfrm>
-            <a:off x="473800" y="234965"/>
-            <a:ext cx="581025" cy="581025"/>
-          </a:xfrm>
-          <a:prstGeom prst="rect">
-            <a:avLst/>
-          </a:prstGeom>
-          <a:noFill/>
-          <a:extLst>
-            <a:ext uri="{909E8E84-426E-40DD-AFC4-6F175D3DCCD1}">
-              <a14:hiddenFill xmlns:a14="http://schemas.microsoft.com/office/drawing/2010/main">
-                <a:solidFill>
-                  <a:srgbClr val="FFFFFF"/>
-                </a:solidFill>
-              </a14:hiddenFill>
-            </a:ext>
-          </a:extLst>
-        </p:spPr>
-      </p:pic>
-      <p:pic>
-        <p:nvPicPr>
-          <p:cNvPr id="5" name="Picture 4">
-            <a:extLst>
-              <a:ext uri="{FF2B5EF4-FFF2-40B4-BE49-F238E27FC236}">
-                <a16:creationId xmlns:a16="http://schemas.microsoft.com/office/drawing/2014/main" id="{371BECE0-1F05-1854-9298-069316FF67B1}"/>
-              </a:ext>
-            </a:extLst>
-          </p:cNvPr>
-          <p:cNvPicPr>
-            <a:picLocks noChangeAspect="1"/>
-          </p:cNvPicPr>
-          <p:nvPr/>
-        </p:nvPicPr>
-        <p:blipFill>
-          <a:blip r:embed="rId3">
-            <a:extLst>
-              <a:ext uri="{28A0092B-C50C-407E-A947-70E740481C1C}">
-                <a14:useLocalDpi xmlns:a14="http://schemas.microsoft.com/office/drawing/2010/main" val="0"/>
-              </a:ext>
-            </a:extLst>
-          </a:blip>
-          <a:stretch>
-            <a:fillRect/>
-          </a:stretch>
-        </p:blipFill>
-        <p:spPr>
-          <a:xfrm>
-            <a:off x="10810115" y="-42336"/>
-            <a:ext cx="1247776" cy="1247776"/>
-          </a:xfrm>
-          <a:prstGeom prst="rect">
-            <a:avLst/>
-          </a:prstGeom>
-        </p:spPr>
-      </p:pic>
-      <p:pic>
-        <p:nvPicPr>
-          <p:cNvPr id="7" name="Picture 4" descr="Power BI - Udemy Business">
-            <a:extLst>
-              <a:ext uri="{FF2B5EF4-FFF2-40B4-BE49-F238E27FC236}">
-                <a16:creationId xmlns:a16="http://schemas.microsoft.com/office/drawing/2014/main" id="{BC263260-4117-29B0-6BA2-49D929682C2C}"/>
-              </a:ext>
-            </a:extLst>
-          </p:cNvPr>
-          <p:cNvPicPr>
-            <a:picLocks noChangeAspect="1" noChangeArrowheads="1"/>
-          </p:cNvPicPr>
-          <p:nvPr/>
-        </p:nvPicPr>
-        <p:blipFill>
-          <a:blip r:embed="rId4">
-            <a:extLst>
-              <a:ext uri="{28A0092B-C50C-407E-A947-70E740481C1C}">
-                <a14:useLocalDpi xmlns:a14="http://schemas.microsoft.com/office/drawing/2010/main" val="0"/>
-              </a:ext>
-            </a:extLst>
-          </a:blip>
-          <a:srcRect/>
-          <a:stretch>
-            <a:fillRect/>
-          </a:stretch>
-        </p:blipFill>
-        <p:spPr bwMode="auto">
-          <a:xfrm>
-            <a:off x="9734051" y="6063338"/>
-            <a:ext cx="2074230" cy="524039"/>
-          </a:xfrm>
-          <a:prstGeom prst="rect">
-            <a:avLst/>
-          </a:prstGeom>
-          <a:noFill/>
-          <a:extLst>
-            <a:ext uri="{909E8E84-426E-40DD-AFC4-6F175D3DCCD1}">
-              <a14:hiddenFill xmlns:a14="http://schemas.microsoft.com/office/drawing/2010/main">
-                <a:solidFill>
-                  <a:srgbClr val="FFFFFF"/>
-                </a:solidFill>
-              </a14:hiddenFill>
-            </a:ext>
-          </a:extLst>
-        </p:spPr>
-      </p:pic>
-      <p:sp>
-        <p:nvSpPr>
-          <p:cNvPr id="12" name="Rectangle 2">
-            <a:extLst>
-              <a:ext uri="{FF2B5EF4-FFF2-40B4-BE49-F238E27FC236}">
-                <a16:creationId xmlns:a16="http://schemas.microsoft.com/office/drawing/2014/main" id="{2E956524-53C2-84FA-6658-6C7C0B241BD4}"/>
-              </a:ext>
-            </a:extLst>
-          </p:cNvPr>
-          <p:cNvSpPr>
-            <a:spLocks noChangeArrowheads="1"/>
-          </p:cNvSpPr>
-          <p:nvPr/>
-        </p:nvSpPr>
-        <p:spPr bwMode="auto">
-          <a:xfrm>
-            <a:off x="310807" y="3827347"/>
-            <a:ext cx="11570385" cy="785343"/>
-          </a:xfrm>
-          <a:prstGeom prst="rect">
-            <a:avLst/>
-          </a:prstGeom>
-          <a:noFill/>
-          <a:ln>
-            <a:noFill/>
-          </a:ln>
-          <a:effectLst/>
-          <a:extLst>
-            <a:ext uri="{909E8E84-426E-40DD-AFC4-6F175D3DCCD1}">
-              <a14:hiddenFill xmlns:a14="http://schemas.microsoft.com/office/drawing/2010/main">
-                <a:solidFill>
-                  <a:schemeClr val="accent1"/>
-                </a:solidFill>
-              </a14:hiddenFill>
-            </a:ext>
-            <a:ext uri="{91240B29-F687-4F45-9708-019B960494DF}">
-              <a14:hiddenLine xmlns:a14="http://schemas.microsoft.com/office/drawing/2010/main" w="9525">
-                <a:solidFill>
-                  <a:schemeClr val="tx1"/>
-                </a:solidFill>
-                <a:miter lim="800000"/>
-                <a:headEnd/>
-                <a:tailEnd/>
-              </a14:hiddenLine>
-            </a:ext>
-            <a:ext uri="{AF507438-7753-43E0-B8FC-AC1667EBCBE1}">
-              <a14:hiddenEffects xmlns:a14="http://schemas.microsoft.com/office/drawing/2010/main">
-                <a:effectLst>
-                  <a:outerShdw dist="35921" dir="2700000" algn="ctr" rotWithShape="0">
-                    <a:schemeClr val="bg2"/>
-                  </a:outerShdw>
-                </a:effectLst>
-              </a14:hiddenEffects>
-            </a:ext>
-          </a:extLst>
-        </p:spPr>
-        <p:txBody>
-          <a:bodyPr vert="horz" wrap="square" lIns="91440" tIns="45720" rIns="91440" bIns="45720" numCol="1" anchor="ctr" anchorCtr="0" compatLnSpc="1">
-            <a:prstTxWarp prst="textNoShape">
-              <a:avLst/>
-            </a:prstTxWarp>
-            <a:spAutoFit/>
-          </a:bodyPr>
-          <a:lstStyle/>
-          <a:p>
-            <a:pPr eaLnBrk="0" fontAlgn="base" hangingPunct="0">
-              <a:lnSpc>
-                <a:spcPct val="150000"/>
-              </a:lnSpc>
-              <a:spcBef>
-                <a:spcPct val="0"/>
-              </a:spcBef>
-              <a:spcAft>
-                <a:spcPct val="0"/>
-              </a:spcAft>
-            </a:pPr>
-            <a:endParaRPr lang="en-US" altLang="en-US" sz="1600" b="1" dirty="0">
-              <a:latin typeface="Arial" panose="020B0604020202020204" pitchFamily="34" charset="0"/>
-            </a:endParaRPr>
-          </a:p>
-          <a:p>
-            <a:pPr eaLnBrk="0" fontAlgn="base" hangingPunct="0">
-              <a:lnSpc>
-                <a:spcPct val="150000"/>
-              </a:lnSpc>
-              <a:spcBef>
-                <a:spcPct val="0"/>
-              </a:spcBef>
-              <a:spcAft>
-                <a:spcPct val="0"/>
-              </a:spcAft>
-            </a:pPr>
-            <a:endParaRPr lang="en-US" altLang="en-US" sz="1600" b="1" dirty="0">
-              <a:latin typeface="Arial" panose="020B0604020202020204" pitchFamily="34" charset="0"/>
-            </a:endParaRPr>
-          </a:p>
-        </p:txBody>
-      </p:sp>
-      <p:pic>
-        <p:nvPicPr>
-          <p:cNvPr id="9" name="Picture 8">
-            <a:extLst>
-              <a:ext uri="{FF2B5EF4-FFF2-40B4-BE49-F238E27FC236}">
-                <a16:creationId xmlns:a16="http://schemas.microsoft.com/office/drawing/2014/main" id="{93071F66-A994-7731-7A56-9B3126B824D6}"/>
-              </a:ext>
-            </a:extLst>
-          </p:cNvPr>
-          <p:cNvPicPr>
-            <a:picLocks noChangeAspect="1"/>
-          </p:cNvPicPr>
-          <p:nvPr/>
-        </p:nvPicPr>
-        <p:blipFill>
-          <a:blip r:embed="rId5"/>
-          <a:stretch>
-            <a:fillRect/>
-          </a:stretch>
-        </p:blipFill>
-        <p:spPr>
-          <a:xfrm>
-            <a:off x="823378" y="1568168"/>
-            <a:ext cx="10569521" cy="1860832"/>
-          </a:xfrm>
-          <a:prstGeom prst="rect">
-            <a:avLst/>
-          </a:prstGeom>
-        </p:spPr>
-      </p:pic>
-      <p:pic>
-        <p:nvPicPr>
-          <p:cNvPr id="10" name="Picture 6" descr="Like Comment Share PNGs for Free Download">
-            <a:extLst>
-              <a:ext uri="{FF2B5EF4-FFF2-40B4-BE49-F238E27FC236}">
-                <a16:creationId xmlns:a16="http://schemas.microsoft.com/office/drawing/2014/main" id="{B7973AAD-27E9-874F-3F41-5F65A941A4B3}"/>
-              </a:ext>
-            </a:extLst>
-          </p:cNvPr>
-          <p:cNvPicPr>
-            <a:picLocks noChangeAspect="1" noChangeArrowheads="1"/>
-          </p:cNvPicPr>
-          <p:nvPr/>
-        </p:nvPicPr>
-        <p:blipFill>
-          <a:blip r:embed="rId6">
-            <a:extLst>
-              <a:ext uri="{28A0092B-C50C-407E-A947-70E740481C1C}">
-                <a14:useLocalDpi xmlns:a14="http://schemas.microsoft.com/office/drawing/2010/main" val="0"/>
-              </a:ext>
-            </a:extLst>
-          </a:blip>
-          <a:srcRect/>
-          <a:stretch>
-            <a:fillRect/>
-          </a:stretch>
-        </p:blipFill>
-        <p:spPr bwMode="auto">
-          <a:xfrm>
-            <a:off x="3303107" y="2201887"/>
-            <a:ext cx="5325357" cy="5325357"/>
-          </a:xfrm>
-          <a:prstGeom prst="rect">
-            <a:avLst/>
-          </a:prstGeom>
-          <a:noFill/>
-          <a:extLst>
-            <a:ext uri="{909E8E84-426E-40DD-AFC4-6F175D3DCCD1}">
-              <a14:hiddenFill xmlns:a14="http://schemas.microsoft.com/office/drawing/2010/main">
-                <a:solidFill>
-                  <a:srgbClr val="FFFFFF"/>
-                </a:solidFill>
-              </a14:hiddenFill>
-            </a:ext>
-          </a:extLst>
-        </p:spPr>
-      </p:pic>
-    </p:spTree>
-    <p:extLst>
-      <p:ext uri="{BB962C8B-B14F-4D97-AF65-F5344CB8AC3E}">
-        <p14:creationId xmlns:p14="http://schemas.microsoft.com/office/powerpoint/2010/main" val="154510020"/>
       </p:ext>
     </p:extLst>
   </p:cSld>
